--- a/logo/Presentation1.pptx
+++ b/logo/Presentation1.pptx
@@ -6,7 +6,8 @@
   </p:sldMasterIdLst>
   <p:sldIdLst>
     <p:sldId id="256" r:id="rId2"/>
-    <p:sldId id="257" r:id="rId3"/>
+    <p:sldId id="258" r:id="rId3"/>
+    <p:sldId id="257" r:id="rId4"/>
   </p:sldIdLst>
   <p:sldSz cx="12192000" cy="6858000"/>
   <p:notesSz cx="6858000" cy="9144000"/>
@@ -3435,6 +3436,162 @@
 </file>
 
 <file path=ppt/slides/slide2.xml><?xml version="1.0" encoding="utf-8"?>
+<p:sld xmlns:a="http://schemas.openxmlformats.org/drawingml/2006/main" xmlns:r="http://schemas.openxmlformats.org/officeDocument/2006/relationships" xmlns:p="http://schemas.openxmlformats.org/presentationml/2006/main">
+  <p:cSld>
+    <p:spTree>
+      <p:nvGrpSpPr>
+        <p:cNvPr id="1" name="">
+          <a:extLst>
+            <a:ext uri="{FF2B5EF4-FFF2-40B4-BE49-F238E27FC236}">
+              <a16:creationId xmlns:a16="http://schemas.microsoft.com/office/drawing/2014/main" id="{B47256C7-E860-6F77-53B2-32C514075A2E}"/>
+            </a:ext>
+          </a:extLst>
+        </p:cNvPr>
+        <p:cNvGrpSpPr/>
+        <p:nvPr/>
+      </p:nvGrpSpPr>
+      <p:grpSpPr>
+        <a:xfrm>
+          <a:off x="0" y="0"/>
+          <a:ext cx="0" cy="0"/>
+          <a:chOff x="0" y="0"/>
+          <a:chExt cx="0" cy="0"/>
+        </a:xfrm>
+      </p:grpSpPr>
+      <p:pic>
+        <p:nvPicPr>
+          <p:cNvPr id="11" name="Picture 10" descr="A black background with a black square&#10;&#10;AI-generated content may be incorrect.">
+            <a:extLst>
+              <a:ext uri="{FF2B5EF4-FFF2-40B4-BE49-F238E27FC236}">
+                <a16:creationId xmlns:a16="http://schemas.microsoft.com/office/drawing/2014/main" id="{75E296B4-52C8-C399-F499-FEFB1CA52724}"/>
+              </a:ext>
+            </a:extLst>
+          </p:cNvPr>
+          <p:cNvPicPr>
+            <a:picLocks noChangeAspect="1"/>
+          </p:cNvPicPr>
+          <p:nvPr/>
+        </p:nvPicPr>
+        <p:blipFill>
+          <a:blip r:embed="rId2">
+            <a:duotone>
+              <a:schemeClr val="accent1">
+                <a:shade val="45000"/>
+                <a:satMod val="135000"/>
+              </a:schemeClr>
+              <a:prstClr val="white"/>
+            </a:duotone>
+          </a:blip>
+          <a:stretch>
+            <a:fillRect/>
+          </a:stretch>
+        </p:blipFill>
+        <p:spPr>
+          <a:xfrm>
+            <a:off x="3995057" y="1464884"/>
+            <a:ext cx="2100943" cy="2100943"/>
+          </a:xfrm>
+          <a:prstGeom prst="rect">
+            <a:avLst/>
+          </a:prstGeom>
+        </p:spPr>
+      </p:pic>
+      <p:sp>
+        <p:nvSpPr>
+          <p:cNvPr id="12" name="TextBox 11">
+            <a:extLst>
+              <a:ext uri="{FF2B5EF4-FFF2-40B4-BE49-F238E27FC236}">
+                <a16:creationId xmlns:a16="http://schemas.microsoft.com/office/drawing/2014/main" id="{DB1EA64E-E8FC-6A9A-34DF-0496F598D0BB}"/>
+              </a:ext>
+            </a:extLst>
+          </p:cNvPr>
+          <p:cNvSpPr txBox="1"/>
+          <p:nvPr/>
+        </p:nvSpPr>
+        <p:spPr>
+          <a:xfrm>
+            <a:off x="1910442" y="3240314"/>
+            <a:ext cx="6270171" cy="1569660"/>
+          </a:xfrm>
+          <a:prstGeom prst="rect">
+            <a:avLst/>
+          </a:prstGeom>
+          <a:noFill/>
+        </p:spPr>
+        <p:txBody>
+          <a:bodyPr wrap="square" rtlCol="0">
+            <a:spAutoFit/>
+          </a:bodyPr>
+          <a:lstStyle/>
+          <a:p>
+            <a:pPr algn="ctr"/>
+            <a:r>
+              <a:rPr lang="en-US" sz="9600" b="1" i="1" spc="-300" dirty="0">
+                <a:solidFill>
+                  <a:srgbClr val="124667"/>
+                </a:solidFill>
+                <a:latin typeface="Lora" pitchFamily="2" charset="77"/>
+              </a:rPr>
+              <a:t>Villa</a:t>
+            </a:r>
+          </a:p>
+        </p:txBody>
+      </p:sp>
+      <p:sp>
+        <p:nvSpPr>
+          <p:cNvPr id="4" name="TextBox 3">
+            <a:extLst>
+              <a:ext uri="{FF2B5EF4-FFF2-40B4-BE49-F238E27FC236}">
+                <a16:creationId xmlns:a16="http://schemas.microsoft.com/office/drawing/2014/main" id="{383320B0-2D69-326E-A0A9-350E044C04A6}"/>
+              </a:ext>
+            </a:extLst>
+          </p:cNvPr>
+          <p:cNvSpPr txBox="1"/>
+          <p:nvPr/>
+        </p:nvSpPr>
+        <p:spPr>
+          <a:xfrm>
+            <a:off x="1910442" y="4307114"/>
+            <a:ext cx="6270171" cy="1569660"/>
+          </a:xfrm>
+          <a:prstGeom prst="rect">
+            <a:avLst/>
+          </a:prstGeom>
+          <a:noFill/>
+        </p:spPr>
+        <p:txBody>
+          <a:bodyPr wrap="square" rtlCol="0">
+            <a:spAutoFit/>
+          </a:bodyPr>
+          <a:lstStyle/>
+          <a:p>
+            <a:pPr algn="ctr"/>
+            <a:r>
+              <a:rPr lang="en-US" sz="9600" b="1" i="1" spc="-300" dirty="0">
+                <a:solidFill>
+                  <a:srgbClr val="124667"/>
+                </a:solidFill>
+                <a:latin typeface="Lora" pitchFamily="2" charset="77"/>
+              </a:rPr>
+              <a:t>Palm</a:t>
+            </a:r>
+          </a:p>
+        </p:txBody>
+      </p:sp>
+    </p:spTree>
+    <p:extLst>
+      <p:ext uri="{BB962C8B-B14F-4D97-AF65-F5344CB8AC3E}">
+        <p14:creationId xmlns:p14="http://schemas.microsoft.com/office/powerpoint/2010/main" val="3712857097"/>
+      </p:ext>
+    </p:extLst>
+  </p:cSld>
+  <p:clrMapOvr>
+    <a:masterClrMapping/>
+  </p:clrMapOvr>
+</p:sld>
+</file>
+
+<file path=ppt/slides/slide3.xml><?xml version="1.0" encoding="utf-8"?>
 <p:sld xmlns:a="http://schemas.openxmlformats.org/drawingml/2006/main" xmlns:r="http://schemas.openxmlformats.org/officeDocument/2006/relationships" xmlns:p="http://schemas.openxmlformats.org/presentationml/2006/main">
   <p:cSld>
     <p:bg>
